--- a/public/fun/pack/pptx/newspro/카드뉴스프리미엄_10_오늘의한마디_올리브샴페인.pptx
+++ b/public/fun/pack/pptx/newspro/카드뉴스프리미엄_10_오늘의한마디_올리브샴페인.pptx
@@ -113,12 +113,12 @@
   <p:extLst>
     <p:ext uri="{521415D9-36F7-43E2-AB2F-B90AF26B5E84}">
       <p14:sectionLst xmlns:p14="http://schemas.microsoft.com/office/powerpoint/2010/main">
-        <p14:section name="시작" id="{3EBAC70A-CFD1-4EB8-AD32-997D4382ACFF}">
+        <p14:section name="시작" id="{B2AAA455-E00D-440F-944C-A9EFD4AEC333}">
           <p14:sldIdLst>
             <p14:sldId id="256"/>
           </p14:sldIdLst>
         </p14:section>
-        <p14:section name="본문" id="{FB2F18B9-B850-46DC-9FFC-6EE19B84AAD4}">
+        <p14:section name="본문" id="{7F35634A-1C42-47AD-A91F-FAA763445E27}">
           <p14:sldIdLst>
             <p14:sldId id="257"/>
             <p14:sldId id="258"/>
@@ -127,7 +127,7 @@
             <p14:sldId id="261"/>
           </p14:sldIdLst>
         </p14:section>
-        <p14:section name="마무리" id="{39D0FB3F-964C-4DB2-91FF-673D7E191B28}">
+        <p14:section name="마무리" id="{2C228288-536D-46EB-A3C1-2C7E0621257E}">
           <p14:sldIdLst>
             <p14:sldId id="262"/>
           </p14:sldIdLst>
@@ -1472,7 +1472,7 @@
             </a:lvl1pPr>
           </a:lstStyle>
           <a:p>
-            <a:fld id="{1D7620AE-3CA0-4FD5-B79E-32FF33F5E3C7}" type="slidenum">
+            <a:fld id="{CADC435C-C28B-4266-BFCB-2230530628BA}" type="slidenum">
               <a:rPr lang="en-US"/>
               <a:t>‹#›</a:t>
             </a:fld>
@@ -2151,7 +2151,7 @@
             </a:lvl1pPr>
           </a:lstStyle>
           <a:p>
-            <a:fld id="{0CD48108-2E96-40AE-8BBD-78AF2F350DE2}" type="slidenum">
+            <a:fld id="{DB1078A8-4E0D-4FE3-8A45-A249E9495737}" type="slidenum">
               <a:rPr lang="en-US"/>
               <a:t>‹#›</a:t>
             </a:fld>
@@ -2900,7 +2900,7 @@
             </a:lvl1pPr>
           </a:lstStyle>
           <a:p>
-            <a:fld id="{C6593441-63C8-455A-9330-A25A684C3943}" type="slidenum">
+            <a:fld id="{2BBAF476-54D1-4CC2-BF5B-5222B3ED71E2}" type="slidenum">
               <a:rPr lang="en-US"/>
               <a:t>‹#›</a:t>
             </a:fld>
@@ -3892,7 +3892,7 @@
           <a:bodyPr/>
           <a:lstStyle/>
           <a:p>
-            <a:fld id="{B1AD0974-BE5A-43A1-8C72-04D1BD4BC0C4}" type="slidenum">
+            <a:fld id="{5A315157-1D93-45C3-AF5C-F749EEEF3E6E}" type="slidenum">
               <a:rPr lang="en-US"/>
               <a:t>‹#›</a:t>
             </a:fld>
@@ -4080,7 +4080,7 @@
           <a:bodyPr/>
           <a:lstStyle/>
           <a:p>
-            <a:fld id="{214BA5A1-660F-4E1D-A7DF-FD9235139F4A}" type="slidenum">
+            <a:fld id="{046CF440-4668-4219-90E3-1424026EDAB5}" type="slidenum">
               <a:rPr lang="en-US"/>
               <a:t>‹#›</a:t>
             </a:fld>
@@ -4268,7 +4268,7 @@
           <a:bodyPr/>
           <a:lstStyle/>
           <a:p>
-            <a:fld id="{FA1255D6-5BBB-4389-89D6-3317347BCFA0}" type="slidenum">
+            <a:fld id="{6A18CE33-90AC-4E36-BFFB-C284D9C66C42}" type="slidenum">
               <a:rPr lang="en-US"/>
               <a:t>‹#›</a:t>
             </a:fld>
@@ -4456,7 +4456,7 @@
           <a:bodyPr/>
           <a:lstStyle/>
           <a:p>
-            <a:fld id="{70B38EEF-EF13-4E44-A08B-2F3FD8BAA426}" type="slidenum">
+            <a:fld id="{5634E297-D256-40F7-AC2B-3082C6283FF5}" type="slidenum">
               <a:rPr lang="en-US"/>
               <a:t>‹#›</a:t>
             </a:fld>
@@ -4644,7 +4644,7 @@
           <a:bodyPr/>
           <a:lstStyle/>
           <a:p>
-            <a:fld id="{299DA0D8-DC01-42E1-B4A2-AC95E17D1835}" type="slidenum">
+            <a:fld id="{E3C98ED3-8E49-44C7-BFD6-AF04FA2D2C21}" type="slidenum">
               <a:rPr lang="en-US"/>
               <a:t>‹#›</a:t>
             </a:fld>
